--- a/docs/2026_ゲーム制作集中講座 Bグループ_Ver1.2.pptx
+++ b/docs/2026_ゲーム制作集中講座 Bグループ_Ver1.2.pptx
@@ -5939,7 +5939,27 @@
                 <a:latin typeface="HGP創英角ｺﾞｼｯｸUB" panose="020B0900000000000000" pitchFamily="50" charset="-128"/>
                 <a:ea typeface="HGP創英角ｺﾞｼｯｸUB" panose="020B0900000000000000" pitchFamily="50" charset="-128"/>
               </a:rPr>
-              <a:t>マンジャロを使用した時の効果と懸念点を学び</a:t>
+              <a:t>マンジャロを使用した時の</a:t>
+            </a:r>
+            <a:r>
+              <a:rPr kumimoji="1" lang="ja-JP" altLang="en-US" sz="2000">
+                <a:solidFill>
+                  <a:schemeClr val="tx1"/>
+                </a:solidFill>
+                <a:latin typeface="HGP創英角ｺﾞｼｯｸUB" panose="020B0900000000000000" pitchFamily="50" charset="-128"/>
+                <a:ea typeface="HGP創英角ｺﾞｼｯｸUB" panose="020B0900000000000000" pitchFamily="50" charset="-128"/>
+              </a:rPr>
+              <a:t>効果と制限を</a:t>
+            </a:r>
+            <a:r>
+              <a:rPr kumimoji="1" lang="ja-JP" altLang="en-US" sz="2000" dirty="0">
+                <a:solidFill>
+                  <a:schemeClr val="tx1"/>
+                </a:solidFill>
+                <a:latin typeface="HGP創英角ｺﾞｼｯｸUB" panose="020B0900000000000000" pitchFamily="50" charset="-128"/>
+                <a:ea typeface="HGP創英角ｺﾞｼｯｸUB" panose="020B0900000000000000" pitchFamily="50" charset="-128"/>
+              </a:rPr>
+              <a:t>学び</a:t>
             </a:r>
             <a:endParaRPr kumimoji="1" lang="en-US" altLang="ja-JP" sz="2000" dirty="0">
               <a:solidFill>
